--- a/assets/pptx/catalog-544.pptx
+++ b/assets/pptx/catalog-544.pptx
@@ -3373,7 +3373,7 @@
                 <a:ea typeface="Ebrima"/>
                 <a:cs typeface="Ebrima"/>
               </a:rPr>
-              <a:t>አዝ ማነው ማነው እንዳንተ ማነው (2x)</a:t>
+              <a:t>አዝ ማነው ማነው እንዳንተ ማነው 2x</a:t>
             </a:r>
           </a:p>
           <a:p>
@@ -3409,7 +3409,7 @@
                 <a:ea typeface="Ebrima"/>
                 <a:cs typeface="Ebrima"/>
               </a:rPr>
-              <a:t>ማነው ማነው እንዳንተ ማነው (2x)</a:t>
+              <a:t>ማነው ማነው እንዳንተ ማነው 2x</a:t>
             </a:r>
           </a:p>
           <a:p>
@@ -3615,7 +3615,7 @@
                 <a:ea typeface="Ebrima"/>
                 <a:cs typeface="Ebrima"/>
               </a:rPr>
-              <a:t>አዝ ማነው ማነው እንዳንተ ማነው (2x)</a:t>
+              <a:t>አዝ ማነው ማነው እንዳንተ ማነው 2x</a:t>
             </a:r>
           </a:p>
           <a:p>
@@ -3651,7 +3651,7 @@
                 <a:ea typeface="Ebrima"/>
                 <a:cs typeface="Ebrima"/>
               </a:rPr>
-              <a:t>ማነው ማነው እንዳንተ ማነው (2x)</a:t>
+              <a:t>ማነው ማነው እንዳንተ ማነው 2x</a:t>
             </a:r>
           </a:p>
           <a:p>
@@ -3669,7 +3669,7 @@
                 <a:ea typeface="Ebrima"/>
                 <a:cs typeface="Ebrima"/>
               </a:rPr>
-              <a:t>ከአንተ በቀር አምላክስ ማነው (3x)</a:t>
+              <a:t>ከአንተ በቀር አምላክስ ማነው 3x</a:t>
             </a:r>
           </a:p>
         </p:txBody>
@@ -3857,7 +3857,7 @@
                 <a:ea typeface="Ebrima"/>
                 <a:cs typeface="Ebrima"/>
               </a:rPr>
-              <a:t>አዝ ማነው ማነው እንዳንተ ማነው (2x)</a:t>
+              <a:t>አዝ ማነው ማነው እንዳንተ ማነው 2x</a:t>
             </a:r>
           </a:p>
           <a:p>
@@ -3893,7 +3893,7 @@
                 <a:ea typeface="Ebrima"/>
                 <a:cs typeface="Ebrima"/>
               </a:rPr>
-              <a:t>ማነው ማነው እንዳንተ ማነው (2x)</a:t>
+              <a:t>ማነው ማነው እንዳንተ ማነው 2x</a:t>
             </a:r>
           </a:p>
           <a:p>
@@ -4099,7 +4099,7 @@
                 <a:ea typeface="Ebrima"/>
                 <a:cs typeface="Ebrima"/>
               </a:rPr>
-              <a:t>አዝ ማነው ማነው እንዳንተ ማነው (2x)</a:t>
+              <a:t>አዝ ማነው ማነው እንዳንተ ማነው 2x</a:t>
             </a:r>
           </a:p>
           <a:p>
@@ -4135,7 +4135,7 @@
                 <a:ea typeface="Ebrima"/>
                 <a:cs typeface="Ebrima"/>
               </a:rPr>
-              <a:t>ማነው ማነው እንዳንተ ማነው (2x)</a:t>
+              <a:t>ማነው ማነው እንዳንተ ማነው 2x</a:t>
             </a:r>
           </a:p>
           <a:p>
@@ -4341,7 +4341,7 @@
                 <a:ea typeface="Ebrima"/>
                 <a:cs typeface="Ebrima"/>
               </a:rPr>
-              <a:t>አዝ ማነው ማነው እንደእርሱ ማነው (2x)</a:t>
+              <a:t>አዝ ማነው ማነው እንደእርሱ ማነው 2x</a:t>
             </a:r>
           </a:p>
           <a:p>
@@ -4377,7 +4377,7 @@
                 <a:ea typeface="Ebrima"/>
                 <a:cs typeface="Ebrima"/>
               </a:rPr>
-              <a:t>ማነው ማነው እንዳንተ ማነው (2x)</a:t>
+              <a:t>ማነው ማነው እንዳንተ ማነው 2x</a:t>
             </a:r>
           </a:p>
           <a:p>
@@ -4583,7 +4583,7 @@
                 <a:ea typeface="Ebrima"/>
                 <a:cs typeface="Ebrima"/>
               </a:rPr>
-              <a:t>አዝ ማነው ማነው እንዳንተ ማነው(2x)</a:t>
+              <a:t>አዝ ማነው ማነው እንዳንተ ማነው2x</a:t>
             </a:r>
           </a:p>
           <a:p>
@@ -4619,7 +4619,7 @@
                 <a:ea typeface="Ebrima"/>
                 <a:cs typeface="Ebrima"/>
               </a:rPr>
-              <a:t>ማነው ማነው እንደእርሱ ማነው (2x)</a:t>
+              <a:t>ማነው ማነው እንደእርሱ ማነው 2x</a:t>
             </a:r>
           </a:p>
           <a:p>
